--- a/slides/7_agents.pptx
+++ b/slides/7_agents.pptx
@@ -3867,7 +3867,7 @@
           <a:p>
             <a:fld id="{BD87B4AA-1AD3-B645-8C46-4DD33D66A771}" type="datetimeFigureOut">
               <a:rPr lang="de-DE" smtClean="0"/>
-              <a:t>18.07.25</a:t>
+              <a:t>09.09.25</a:t>
             </a:fld>
             <a:endParaRPr lang="de-DE"/>
           </a:p>
@@ -4281,7 +4281,7 @@
           <a:p>
             <a:fld id="{A40820F7-6C91-3C46-AB35-1A00849882C2}" type="datetime1">
               <a:rPr lang="de-DE" smtClean="0"/>
-              <a:t>18.07.25</a:t>
+              <a:t>09.09.25</a:t>
             </a:fld>
             <a:endParaRPr lang="de-DE"/>
           </a:p>
@@ -4479,7 +4479,7 @@
           <a:p>
             <a:fld id="{EF0C22EE-8BC1-4F47-9F25-6E6DC0837CD0}" type="datetime1">
               <a:rPr lang="de-DE" smtClean="0"/>
-              <a:t>18.07.25</a:t>
+              <a:t>09.09.25</a:t>
             </a:fld>
             <a:endParaRPr lang="de-DE"/>
           </a:p>
@@ -4687,7 +4687,7 @@
           <a:p>
             <a:fld id="{BF6F7086-E239-CB4C-AE08-764D923FF446}" type="datetime1">
               <a:rPr lang="de-DE" smtClean="0"/>
-              <a:t>18.07.25</a:t>
+              <a:t>09.09.25</a:t>
             </a:fld>
             <a:endParaRPr lang="de-DE"/>
           </a:p>
@@ -4885,7 +4885,7 @@
           <a:p>
             <a:fld id="{7613D0D4-D4D8-A942-9E01-A0F3487CA2AE}" type="datetime1">
               <a:rPr lang="de-DE" smtClean="0"/>
-              <a:t>18.07.25</a:t>
+              <a:t>09.09.25</a:t>
             </a:fld>
             <a:endParaRPr lang="de-DE"/>
           </a:p>
@@ -5160,7 +5160,7 @@
           <a:p>
             <a:fld id="{EF46364B-D759-F14C-A18A-77E1D17B19D4}" type="datetime1">
               <a:rPr lang="de-DE" smtClean="0"/>
-              <a:t>18.07.25</a:t>
+              <a:t>09.09.25</a:t>
             </a:fld>
             <a:endParaRPr lang="de-DE"/>
           </a:p>
@@ -5425,7 +5425,7 @@
           <a:p>
             <a:fld id="{2F2646AF-F89F-2E4E-92DF-9EEE6DD3C59D}" type="datetime1">
               <a:rPr lang="de-DE" smtClean="0"/>
-              <a:t>18.07.25</a:t>
+              <a:t>09.09.25</a:t>
             </a:fld>
             <a:endParaRPr lang="de-DE"/>
           </a:p>
@@ -5837,7 +5837,7 @@
           <a:p>
             <a:fld id="{8BBAE3CD-AF3C-CB44-B965-65B6EC4247CF}" type="datetime1">
               <a:rPr lang="de-DE" smtClean="0"/>
-              <a:t>18.07.25</a:t>
+              <a:t>09.09.25</a:t>
             </a:fld>
             <a:endParaRPr lang="de-DE"/>
           </a:p>
@@ -5978,7 +5978,7 @@
           <a:p>
             <a:fld id="{1CD7B66C-CFE0-CA4E-9046-939F1A7C2E41}" type="datetime1">
               <a:rPr lang="de-DE" smtClean="0"/>
-              <a:t>18.07.25</a:t>
+              <a:t>09.09.25</a:t>
             </a:fld>
             <a:endParaRPr lang="de-DE"/>
           </a:p>
@@ -6091,7 +6091,7 @@
           <a:p>
             <a:fld id="{5CD2A422-F575-E249-A0DB-51723ECD1D10}" type="datetime1">
               <a:rPr lang="de-DE" smtClean="0"/>
-              <a:t>18.07.25</a:t>
+              <a:t>09.09.25</a:t>
             </a:fld>
             <a:endParaRPr lang="de-DE"/>
           </a:p>
@@ -6402,7 +6402,7 @@
           <a:p>
             <a:fld id="{550C53E8-F479-1249-A1B6-5903063FF698}" type="datetime1">
               <a:rPr lang="de-DE" smtClean="0"/>
-              <a:t>18.07.25</a:t>
+              <a:t>09.09.25</a:t>
             </a:fld>
             <a:endParaRPr lang="de-DE"/>
           </a:p>
@@ -6690,7 +6690,7 @@
           <a:p>
             <a:fld id="{371E5EAB-7032-2B41-ACE6-C364C7875874}" type="datetime1">
               <a:rPr lang="de-DE" smtClean="0"/>
-              <a:t>18.07.25</a:t>
+              <a:t>09.09.25</a:t>
             </a:fld>
             <a:endParaRPr lang="de-DE"/>
           </a:p>
@@ -6931,7 +6931,7 @@
           <a:p>
             <a:fld id="{7F5E179E-33AE-1B4B-8EB8-E924F1C7104A}" type="datetime1">
               <a:rPr lang="de-DE" smtClean="0"/>
-              <a:t>18.07.25</a:t>
+              <a:t>09.09.25</a:t>
             </a:fld>
             <a:endParaRPr lang="de-DE"/>
           </a:p>
@@ -12690,6 +12690,53 @@
           </a:p>
         </p:txBody>
       </p:sp>
+      <p:pic>
+        <p:nvPicPr>
+          <p:cNvPr id="1026" name="Picture 2" descr="MEMENTO - MEMENTO (1 Blu-ray): Amazon.de: DVD &amp; Blu-ray">
+            <a:extLst>
+              <a:ext uri="{FF2B5EF4-FFF2-40B4-BE49-F238E27FC236}">
+                <a16:creationId xmlns:a16="http://schemas.microsoft.com/office/drawing/2014/main" id="{AFF53CD3-D3A4-8236-FA9C-5BB8A7738883}"/>
+              </a:ext>
+            </a:extLst>
+          </p:cNvPr>
+          <p:cNvPicPr>
+            <a:picLocks noChangeAspect="1" noChangeArrowheads="1"/>
+          </p:cNvPicPr>
+          <p:nvPr/>
+        </p:nvPicPr>
+        <p:blipFill>
+          <a:blip r:embed="rId2">
+            <a:extLst>
+              <a:ext uri="{28A0092B-C50C-407E-A947-70E740481C1C}">
+                <a14:useLocalDpi xmlns:a14="http://schemas.microsoft.com/office/drawing/2010/main" val="0"/>
+              </a:ext>
+            </a:extLst>
+          </a:blip>
+          <a:srcRect/>
+          <a:stretch>
+            <a:fillRect/>
+          </a:stretch>
+        </p:blipFill>
+        <p:spPr bwMode="auto">
+          <a:xfrm>
+            <a:off x="10082151" y="824582"/>
+            <a:ext cx="1775401" cy="2090985"/>
+          </a:xfrm>
+          <a:prstGeom prst="rect">
+            <a:avLst/>
+          </a:prstGeom>
+          <a:noFill/>
+          <a:extLst>
+            <a:ext uri="{909E8E84-426E-40DD-AFC4-6F175D3DCCD1}">
+              <a14:hiddenFill xmlns:a14="http://schemas.microsoft.com/office/drawing/2010/main">
+                <a:solidFill>
+                  <a:srgbClr val="FFFFFF"/>
+                </a:solidFill>
+              </a14:hiddenFill>
+            </a:ext>
+          </a:extLst>
+        </p:spPr>
+      </p:pic>
     </p:spTree>
     <p:extLst>
       <p:ext uri="{BB962C8B-B14F-4D97-AF65-F5344CB8AC3E}">

--- a/slides/7_agents.pptx
+++ b/slides/7_agents.pptx
@@ -11420,7 +11420,12 @@
             <p:ph idx="1"/>
           </p:nvPr>
         </p:nvSpPr>
-        <p:spPr/>
+        <p:spPr>
+          <a:xfrm>
+            <a:off x="838200" y="1825625"/>
+            <a:ext cx="5508592" cy="4351338"/>
+          </a:xfrm>
+        </p:spPr>
         <p:txBody>
           <a:bodyPr>
             <a:normAutofit/>
@@ -11448,12 +11453,6 @@
             </a:r>
           </a:p>
           <a:p>
-            <a:pPr marL="0" indent="0">
-              <a:buNone/>
-            </a:pPr>
-            <a:endParaRPr lang="de-DE" dirty="0"/>
-          </a:p>
-          <a:p>
             <a:pPr marL="514350" indent="-514350">
               <a:buFont typeface="+mj-lt"/>
               <a:buAutoNum type="arabicPeriod"/>
@@ -11577,12 +11576,6 @@
               <a:rPr lang="de-DE" dirty="0"/>
               <a:t>…</a:t>
             </a:r>
-          </a:p>
-          <a:p>
-            <a:pPr marL="0" indent="0">
-              <a:buNone/>
-            </a:pPr>
-            <a:endParaRPr lang="de-DE" dirty="0"/>
           </a:p>
           <a:p>
             <a:pPr marL="514350" indent="-514350">
@@ -11656,6 +11649,75 @@
               <a:t>6</a:t>
             </a:fld>
             <a:endParaRPr lang="de-DE"/>
+          </a:p>
+        </p:txBody>
+      </p:sp>
+      <p:pic>
+        <p:nvPicPr>
+          <p:cNvPr id="5" name="Picture 14">
+            <a:extLst>
+              <a:ext uri="{FF2B5EF4-FFF2-40B4-BE49-F238E27FC236}">
+                <a16:creationId xmlns:a16="http://schemas.microsoft.com/office/drawing/2014/main" id="{79A3FAC2-66F8-22DF-E4A3-6BFD6009A03D}"/>
+              </a:ext>
+            </a:extLst>
+          </p:cNvPr>
+          <p:cNvPicPr>
+            <a:picLocks noChangeAspect="1"/>
+          </p:cNvPicPr>
+          <p:nvPr/>
+        </p:nvPicPr>
+        <p:blipFill>
+          <a:blip r:embed="rId2"/>
+          <a:stretch>
+            <a:fillRect/>
+          </a:stretch>
+        </p:blipFill>
+        <p:spPr>
+          <a:xfrm>
+            <a:off x="6346792" y="1538879"/>
+            <a:ext cx="5845208" cy="4924830"/>
+          </a:xfrm>
+          <a:prstGeom prst="rect">
+            <a:avLst/>
+          </a:prstGeom>
+        </p:spPr>
+      </p:pic>
+      <p:sp>
+        <p:nvSpPr>
+          <p:cNvPr id="6" name="Textfeld 5">
+            <a:extLst>
+              <a:ext uri="{FF2B5EF4-FFF2-40B4-BE49-F238E27FC236}">
+                <a16:creationId xmlns:a16="http://schemas.microsoft.com/office/drawing/2014/main" id="{E7F90AF8-31B9-61F4-4A0F-5E8B4F7468F4}"/>
+              </a:ext>
+            </a:extLst>
+          </p:cNvPr>
+          <p:cNvSpPr txBox="1"/>
+          <p:nvPr/>
+        </p:nvSpPr>
+        <p:spPr>
+          <a:xfrm>
+            <a:off x="8324265" y="1034610"/>
+            <a:ext cx="1890261" cy="369332"/>
+          </a:xfrm>
+          <a:prstGeom prst="rect">
+            <a:avLst/>
+          </a:prstGeom>
+          <a:noFill/>
+        </p:spPr>
+        <p:txBody>
+          <a:bodyPr wrap="none" rtlCol="0">
+            <a:spAutoFit/>
+          </a:bodyPr>
+          <a:lstStyle/>
+          <a:p>
+            <a:r>
+              <a:rPr lang="de-DE" dirty="0" err="1"/>
+              <a:t>example</a:t>
+            </a:r>
+            <a:r>
+              <a:rPr lang="de-DE" dirty="0"/>
+              <a:t>: OpenAI</a:t>
+            </a:r>
           </a:p>
         </p:txBody>
       </p:sp>
